--- a/docs/company-profile/선영회계법인_회사소개서_2026_수정.pptx
+++ b/docs/company-profile/선영회계법인_회사소개서_2026_수정.pptx
@@ -3430,6 +3430,84 @@
       </p:sp>
       <p:sp>
         <p:nvSpPr>
+          <p:cNvPr id="22" name="Text 22"/>
+          <p:cNvSpPr txBox="1"/>
+          <p:nvPr/>
+        </p:nvSpPr>
+        <p:spPr>
+          <a:xfrm>
+            <a:off x="457200" y="4114800"/>
+            <a:ext cx="1280160" cy="274320"/>
+          </a:xfrm>
+          <a:prstGeom prst="rect">
+            <a:avLst/>
+          </a:prstGeom>
+          <a:noFill/>
+          <a:ln/>
+        </p:spPr>
+        <p:txBody>
+          <a:bodyPr wrap="square" lIns="0" tIns="0" rIns="0" bIns="0" rtlCol="0" anchor="ctr"/>
+          <a:lstStyle/>
+          <a:p>
+            <a:pPr indent="0" marL="0">
+              <a:buNone/>
+            </a:pPr>
+            <a:r>
+              <a:rPr lang="en-US" sz="1000" dirty="0">
+                <a:solidFill>
+                  <a:srgbClr val="6F7A8C"/>
+                </a:solidFill>
+                <a:latin typeface="Malgun Gothic" pitchFamily="34" charset="0"/>
+                <a:ea typeface="Malgun Gothic" pitchFamily="34" charset="-122"/>
+                <a:cs typeface="Malgun Gothic" pitchFamily="34" charset="-120"/>
+              </a:rPr>
+              <a:t>이메일</a:t>
+            </a:r>
+            <a:endParaRPr lang="en-US" sz="1000" dirty="0"/>
+          </a:p>
+        </p:txBody>
+      </p:sp>
+      <p:sp>
+        <p:nvSpPr>
+          <p:cNvPr id="23" name="Text 23"/>
+          <p:cNvSpPr txBox="1"/>
+          <p:nvPr/>
+        </p:nvSpPr>
+        <p:spPr>
+          <a:xfrm>
+            <a:off x="1737360" y="4114800"/>
+            <a:ext cx="4572000" cy="274320"/>
+          </a:xfrm>
+          <a:prstGeom prst="rect">
+            <a:avLst/>
+          </a:prstGeom>
+          <a:noFill/>
+          <a:ln/>
+        </p:spPr>
+        <p:txBody>
+          <a:bodyPr wrap="square" lIns="0" tIns="0" rIns="0" bIns="0" rtlCol="0" anchor="ctr"/>
+          <a:lstStyle/>
+          <a:p>
+            <a:pPr indent="0" marL="0">
+              <a:buNone/>
+            </a:pPr>
+            <a:r>
+              <a:rPr lang="en-US" sz="1200" dirty="0">
+                <a:solidFill>
+                  <a:srgbClr val="FFFFFF"/>
+                </a:solidFill>
+                <a:latin typeface="Malgun Gothic" pitchFamily="34" charset="0"/>
+                <a:ea typeface="Malgun Gothic" pitchFamily="34" charset="-122"/>
+                <a:cs typeface="Malgun Gothic" pitchFamily="34" charset="-120"/>
+              </a:rPr>
+              <a:t>junholee@syacc.co.kr</a:t>
+            </a:r>
+            <a:endParaRPr lang="en-US" sz="1200" dirty="0"/>
+          </a:p>
+        </p:txBody>
+      </p:sp>
+      <p:sp>
+        <p:nvSpPr>
           <p:cNvPr id="14" name="Shape 12"/>
           <p:cNvSpPr/>
           <p:nvPr/>

--- a/docs/company-profile/선영회계법인_회사소개서_2026_수정.pptx
+++ b/docs/company-profile/선영회계법인_회사소개서_2026_수정.pptx
@@ -1750,7 +1750,7 @@
           <a:blip r:embed="rId1">
             <a:lum/>
           </a:blip>
-          <a:srcRect/>
+          <a:srcRect l="3333" r="3333"/>
           <a:stretch>
             <a:fillRect/>
           </a:stretch>
@@ -1822,121 +1822,6 @@
               <a:t>   ACCOUNTING CORPORATION</a:t>
             </a:r>
             <a:endParaRPr lang="en-US" sz="1100" dirty="0"/>
-          </a:p>
-        </p:txBody>
-      </p:sp>
-      <p:sp>
-        <p:nvSpPr>
-          <p:cNvPr id="3" name="Text 1"/>
-          <p:cNvSpPr txBox="1"/>
-          <p:nvPr/>
-        </p:nvSpPr>
-        <p:spPr>
-          <a:xfrm>
-            <a:off x="457200" y="1051560"/>
-            <a:ext cx="8229600" cy="2194560"/>
-          </a:xfrm>
-          <a:prstGeom prst="rect">
-            <a:avLst/>
-          </a:prstGeom>
-          <a:noFill/>
-          <a:ln/>
-        </p:spPr>
-        <p:txBody>
-          <a:bodyPr wrap="square" lIns="0" tIns="0" rIns="0" bIns="0" rtlCol="0" anchor="ctr"/>
-          <a:lstStyle/>
-          <a:p>
-            <a:pPr algn="ctr" indent="0" marL="0">
-              <a:lnSpc>
-                <a:spcPct val="95000"/>
-              </a:lnSpc>
-              <a:buNone/>
-            </a:pPr>
-            <a:r>
-              <a:rPr lang="en-US" sz="6600" b="1" dirty="0">
-                <a:solidFill>
-                  <a:srgbClr val="E6EEF9"/>
-                </a:solidFill>
-                <a:latin typeface="Arial" pitchFamily="34" charset="0"/>
-                <a:ea typeface="Arial" pitchFamily="34" charset="-122"/>
-                <a:cs typeface="Arial" pitchFamily="34" charset="-120"/>
-              </a:rPr>
-              <a:t>Excellence.</a:t>
-            </a:r>
-            <a:endParaRPr lang="en-US" sz="6600" dirty="0"/>
-          </a:p>
-          <a:p>
-            <a:pPr algn="ctr" indent="0" marL="0">
-              <a:lnSpc>
-                <a:spcPct val="95000"/>
-              </a:lnSpc>
-              <a:buNone/>
-            </a:pPr>
-            <a:r>
-              <a:rPr lang="en-US" sz="6600" b="1" dirty="0">
-                <a:solidFill>
-                  <a:srgbClr val="E6EEF9"/>
-                </a:solidFill>
-                <a:latin typeface="Arial" pitchFamily="34" charset="0"/>
-                <a:ea typeface="Arial" pitchFamily="34" charset="-122"/>
-                <a:cs typeface="Arial" pitchFamily="34" charset="-120"/>
-              </a:rPr>
-              <a:t>Value.</a:t>
-            </a:r>
-            <a:endParaRPr lang="en-US" sz="6600" dirty="0"/>
-          </a:p>
-        </p:txBody>
-      </p:sp>
-      <p:sp>
-        <p:nvSpPr>
-          <p:cNvPr id="4" name="Text 2"/>
-          <p:cNvSpPr txBox="1"/>
-          <p:nvPr/>
-        </p:nvSpPr>
-        <p:spPr>
-          <a:xfrm>
-            <a:off x="457200" y="3337560"/>
-            <a:ext cx="8229600" cy="365760"/>
-          </a:xfrm>
-          <a:prstGeom prst="rect">
-            <a:avLst/>
-          </a:prstGeom>
-          <a:noFill/>
-          <a:ln/>
-        </p:spPr>
-        <p:txBody>
-          <a:bodyPr wrap="square" lIns="0" tIns="0" rIns="0" bIns="0" rtlCol="0" anchor="ctr"/>
-          <a:lstStyle/>
-          <a:p>
-            <a:pPr algn="ctr" indent="0" marL="0">
-              <a:buNone/>
-            </a:pPr>
-            <a:r>
-              <a:rPr lang="en-US" sz="1500" dirty="0">
-                <a:solidFill>
-                  <a:srgbClr val="B8C0CE"/>
-                </a:solidFill>
-                <a:latin typeface="Malgun Gothic" pitchFamily="34" charset="0"/>
-                <a:ea typeface="Malgun Gothic" pitchFamily="34" charset="-122"/>
-                <a:cs typeface="Malgun Gothic" pitchFamily="34" charset="-120"/>
-              </a:rPr>
-              <a:t>전문성으로 가치를 키우는 곳, </a:t>
-            </a:r>
-            <a:pPr algn="ctr" indent="0" marL="0">
-              <a:buNone/>
-            </a:pPr>
-            <a:r>
-              <a:rPr lang="en-US" sz="1500" b="1" dirty="0">
-                <a:solidFill>
-                  <a:srgbClr val="FFFFFF"/>
-                </a:solidFill>
-                <a:latin typeface="Malgun Gothic" pitchFamily="34" charset="0"/>
-                <a:ea typeface="Malgun Gothic" pitchFamily="34" charset="-122"/>
-                <a:cs typeface="Malgun Gothic" pitchFamily="34" charset="-120"/>
-              </a:rPr>
-              <a:t>선영회계법인</a:t>
-            </a:r>
-            <a:endParaRPr lang="en-US" sz="1500" dirty="0"/>
           </a:p>
         </p:txBody>
       </p:sp>
@@ -2229,14 +2114,78 @@
       </p:sp>
       <p:sp>
         <p:nvSpPr>
-          <p:cNvPr id="7" name="Shape 5"/>
+          <p:cNvPr id="25" name="Text 23"/>
+          <p:cNvSpPr txBox="1"/>
+          <p:nvPr/>
+        </p:nvSpPr>
+        <p:spPr>
+          <a:xfrm>
+            <a:off x="457200" y="4114800"/>
+            <a:ext cx="8229600" cy="274320"/>
+          </a:xfrm>
+          <a:prstGeom prst="rect">
+            <a:avLst/>
+          </a:prstGeom>
+          <a:noFill/>
+          <a:ln/>
+        </p:spPr>
+        <p:txBody>
+          <a:bodyPr wrap="square" lIns="0" tIns="0" rIns="0" bIns="0" rtlCol="0" anchor="ctr"/>
+          <a:lstStyle/>
+          <a:p>
+            <a:pPr algn="ctr" indent="0" marL="0">
+              <a:buNone/>
+            </a:pPr>
+            <a:r>
+              <a:rPr lang="en-US" sz="950" i="1" dirty="0">
+                <a:solidFill>
+                  <a:srgbClr val="6F7A8C"/>
+                </a:solidFill>
+                <a:latin typeface="Arial" pitchFamily="34" charset="0"/>
+                <a:ea typeface="Arial" pitchFamily="34" charset="-122"/>
+                <a:cs typeface="Arial" pitchFamily="34" charset="-120"/>
+              </a:rPr>
+              <a:t>Our Principles  ·  Act with Ownership  |  Leverage Technology for Excellence  |  Uphold Integrity</a:t>
+            </a:r>
+            <a:endParaRPr lang="en-US" sz="950" dirty="0"/>
+          </a:p>
+        </p:txBody>
+      </p:sp>
+      <p:pic>
+        <p:nvPicPr>
+          <p:cNvPr id="26" name="Photo 최학수"/>
+          <p:cNvPicPr>
+            <a:picLocks noChangeAspect="1"/>
+          </p:cNvPicPr>
+          <p:nvPr/>
+        </p:nvPicPr>
+        <p:blipFill>
+          <a:blip r:embed="rId4"/>
+          <a:srcRect/>
+          <a:stretch>
+            <a:fillRect/>
+          </a:stretch>
+        </p:blipFill>
+        <p:spPr>
+          <a:xfrm>
+            <a:off x="457200" y="1965960"/>
+            <a:ext cx="916686" cy="1225025"/>
+          </a:xfrm>
+          <a:prstGeom prst="rect">
+            <a:avLst/>
+          </a:prstGeom>
+        </p:spPr>
+      </p:pic>
+      <p:sp>
+        <p:nvSpPr>
+          <p:cNvPr id="27" name="Card 0"/>
           <p:cNvSpPr/>
           <p:nvPr/>
         </p:nvSpPr>
         <p:spPr>
           <a:xfrm>
-            <a:off x="457200" y="2103120"/>
-            <a:ext cx="1280160" cy="1005840"/>
+            <a:off x="457200" y="3190985"/>
+            <a:ext cx="916686" cy="566928"/>
           </a:xfrm>
           <a:prstGeom prst="rect">
             <a:avLst/>
@@ -2254,14 +2203,14 @@
       </p:sp>
       <p:sp>
         <p:nvSpPr>
-          <p:cNvPr id="8" name="Text 6"/>
-          <p:cNvSpPr txBox="1"/>
-          <p:nvPr/>
-        </p:nvSpPr>
-        <p:spPr>
-          <a:xfrm>
-            <a:off x="457200" y="2331720"/>
-            <a:ext cx="1280160" cy="320040"/>
+          <p:cNvPr id="28" name="Name 0"/>
+          <p:cNvSpPr txBox="1"/>
+          <p:nvPr/>
+        </p:nvSpPr>
+        <p:spPr>
+          <a:xfrm>
+            <a:off x="457200" y="3245849"/>
+            <a:ext cx="916686" cy="274320"/>
           </a:xfrm>
           <a:prstGeom prst="rect">
             <a:avLst/>
@@ -2277,7 +2226,7 @@
               <a:buNone/>
             </a:pPr>
             <a:r>
-              <a:rPr lang="en-US" sz="1500" b="1" dirty="0">
+              <a:rPr lang="en-US" sz="1100" b="1" dirty="0">
                 <a:solidFill>
                   <a:srgbClr val="FFFFFF"/>
                 </a:solidFill>
@@ -2287,20 +2236,20 @@
               </a:rPr>
               <a:t>최학수</a:t>
             </a:r>
-            <a:endParaRPr lang="en-US" sz="1500" dirty="0"/>
-          </a:p>
-        </p:txBody>
-      </p:sp>
-      <p:sp>
-        <p:nvSpPr>
-          <p:cNvPr id="9" name="Text 7"/>
-          <p:cNvSpPr txBox="1"/>
-          <p:nvPr/>
-        </p:nvSpPr>
-        <p:spPr>
-          <a:xfrm>
-            <a:off x="457200" y="2670048"/>
-            <a:ext cx="1280160" cy="228600"/>
+            <a:endParaRPr lang="en-US" sz="1100" dirty="0"/>
+          </a:p>
+        </p:txBody>
+      </p:sp>
+      <p:sp>
+        <p:nvSpPr>
+          <p:cNvPr id="29" name="Role 0"/>
+          <p:cNvSpPr txBox="1"/>
+          <p:nvPr/>
+        </p:nvSpPr>
+        <p:spPr>
+          <a:xfrm>
+            <a:off x="457200" y="3520169"/>
+            <a:ext cx="916686" cy="201168"/>
           </a:xfrm>
           <a:prstGeom prst="rect">
             <a:avLst/>
@@ -2316,7 +2265,7 @@
               <a:buNone/>
             </a:pPr>
             <a:r>
-              <a:rPr lang="en-US" sz="950" dirty="0">
+              <a:rPr lang="en-US" sz="800" dirty="0">
                 <a:solidFill>
                   <a:srgbClr val="B8C0CE"/>
                 </a:solidFill>
@@ -2326,20 +2275,45 @@
               </a:rPr>
               <a:t>대표 회계사</a:t>
             </a:r>
-            <a:endParaRPr lang="en-US" sz="950" dirty="0"/>
-          </a:p>
-        </p:txBody>
-      </p:sp>
-      <p:sp>
-        <p:nvSpPr>
-          <p:cNvPr id="10" name="Shape 8"/>
+            <a:endParaRPr lang="en-US" sz="800" dirty="0"/>
+          </a:p>
+        </p:txBody>
+      </p:sp>
+      <p:pic>
+        <p:nvPicPr>
+          <p:cNvPr id="30" name="Photo 황휘순"/>
+          <p:cNvPicPr>
+            <a:picLocks noChangeAspect="1"/>
+          </p:cNvPicPr>
+          <p:nvPr/>
+        </p:nvPicPr>
+        <p:blipFill>
+          <a:blip r:embed="rId5"/>
+          <a:srcRect/>
+          <a:stretch>
+            <a:fillRect/>
+          </a:stretch>
+        </p:blipFill>
+        <p:spPr>
+          <a:xfrm>
+            <a:off x="1501902" y="1965960"/>
+            <a:ext cx="916686" cy="1225025"/>
+          </a:xfrm>
+          <a:prstGeom prst="rect">
+            <a:avLst/>
+          </a:prstGeom>
+        </p:spPr>
+      </p:pic>
+      <p:sp>
+        <p:nvSpPr>
+          <p:cNvPr id="31" name="Card 1"/>
           <p:cNvSpPr/>
           <p:nvPr/>
         </p:nvSpPr>
         <p:spPr>
           <a:xfrm>
-            <a:off x="1874520" y="2103120"/>
-            <a:ext cx="1280160" cy="1005840"/>
+            <a:off x="1501902" y="3190985"/>
+            <a:ext cx="916686" cy="566928"/>
           </a:xfrm>
           <a:prstGeom prst="rect">
             <a:avLst/>
@@ -2357,14 +2331,14 @@
       </p:sp>
       <p:sp>
         <p:nvSpPr>
-          <p:cNvPr id="11" name="Text 9"/>
-          <p:cNvSpPr txBox="1"/>
-          <p:nvPr/>
-        </p:nvSpPr>
-        <p:spPr>
-          <a:xfrm>
-            <a:off x="1874520" y="2331720"/>
-            <a:ext cx="1280160" cy="320040"/>
+          <p:cNvPr id="32" name="Name 1"/>
+          <p:cNvSpPr txBox="1"/>
+          <p:nvPr/>
+        </p:nvSpPr>
+        <p:spPr>
+          <a:xfrm>
+            <a:off x="1501902" y="3245849"/>
+            <a:ext cx="916686" cy="274320"/>
           </a:xfrm>
           <a:prstGeom prst="rect">
             <a:avLst/>
@@ -2380,7 +2354,7 @@
               <a:buNone/>
             </a:pPr>
             <a:r>
-              <a:rPr lang="en-US" sz="1500" b="1" dirty="0">
+              <a:rPr lang="en-US" sz="1100" b="1" dirty="0">
                 <a:solidFill>
                   <a:srgbClr val="FFFFFF"/>
                 </a:solidFill>
@@ -2390,20 +2364,20 @@
               </a:rPr>
               <a:t>황휘순</a:t>
             </a:r>
-            <a:endParaRPr lang="en-US" sz="1500" dirty="0"/>
-          </a:p>
-        </p:txBody>
-      </p:sp>
-      <p:sp>
-        <p:nvSpPr>
-          <p:cNvPr id="12" name="Text 10"/>
-          <p:cNvSpPr txBox="1"/>
-          <p:nvPr/>
-        </p:nvSpPr>
-        <p:spPr>
-          <a:xfrm>
-            <a:off x="1874520" y="2670048"/>
-            <a:ext cx="1280160" cy="228600"/>
+            <a:endParaRPr lang="en-US" sz="1100" dirty="0"/>
+          </a:p>
+        </p:txBody>
+      </p:sp>
+      <p:sp>
+        <p:nvSpPr>
+          <p:cNvPr id="33" name="Role 1"/>
+          <p:cNvSpPr txBox="1"/>
+          <p:nvPr/>
+        </p:nvSpPr>
+        <p:spPr>
+          <a:xfrm>
+            <a:off x="1501902" y="3520169"/>
+            <a:ext cx="916686" cy="201168"/>
           </a:xfrm>
           <a:prstGeom prst="rect">
             <a:avLst/>
@@ -2419,7 +2393,7 @@
               <a:buNone/>
             </a:pPr>
             <a:r>
-              <a:rPr lang="en-US" sz="950" dirty="0">
+              <a:rPr lang="en-US" sz="800" dirty="0">
                 <a:solidFill>
                   <a:srgbClr val="B8C0CE"/>
                 </a:solidFill>
@@ -2429,20 +2403,45 @@
               </a:rPr>
               <a:t>공인회계사</a:t>
             </a:r>
-            <a:endParaRPr lang="en-US" sz="950" dirty="0"/>
-          </a:p>
-        </p:txBody>
-      </p:sp>
-      <p:sp>
-        <p:nvSpPr>
-          <p:cNvPr id="13" name="Shape 11"/>
+            <a:endParaRPr lang="en-US" sz="800" dirty="0"/>
+          </a:p>
+        </p:txBody>
+      </p:sp>
+      <p:pic>
+        <p:nvPicPr>
+          <p:cNvPr id="34" name="Photo 한만현"/>
+          <p:cNvPicPr>
+            <a:picLocks noChangeAspect="1"/>
+          </p:cNvPicPr>
+          <p:nvPr/>
+        </p:nvPicPr>
+        <p:blipFill>
+          <a:blip r:embed="rId6"/>
+          <a:srcRect/>
+          <a:stretch>
+            <a:fillRect/>
+          </a:stretch>
+        </p:blipFill>
+        <p:spPr>
+          <a:xfrm>
+            <a:off x="2546604" y="1965960"/>
+            <a:ext cx="916686" cy="1225025"/>
+          </a:xfrm>
+          <a:prstGeom prst="rect">
+            <a:avLst/>
+          </a:prstGeom>
+        </p:spPr>
+      </p:pic>
+      <p:sp>
+        <p:nvSpPr>
+          <p:cNvPr id="35" name="Card 2"/>
           <p:cNvSpPr/>
           <p:nvPr/>
         </p:nvSpPr>
         <p:spPr>
           <a:xfrm>
-            <a:off x="3291840" y="2103120"/>
-            <a:ext cx="1280160" cy="1005840"/>
+            <a:off x="2546604" y="3190985"/>
+            <a:ext cx="916686" cy="566928"/>
           </a:xfrm>
           <a:prstGeom prst="rect">
             <a:avLst/>
@@ -2460,14 +2459,14 @@
       </p:sp>
       <p:sp>
         <p:nvSpPr>
-          <p:cNvPr id="14" name="Text 12"/>
-          <p:cNvSpPr txBox="1"/>
-          <p:nvPr/>
-        </p:nvSpPr>
-        <p:spPr>
-          <a:xfrm>
-            <a:off x="3291840" y="2331720"/>
-            <a:ext cx="1280160" cy="320040"/>
+          <p:cNvPr id="36" name="Name 2"/>
+          <p:cNvSpPr txBox="1"/>
+          <p:nvPr/>
+        </p:nvSpPr>
+        <p:spPr>
+          <a:xfrm>
+            <a:off x="2546604" y="3245849"/>
+            <a:ext cx="916686" cy="274320"/>
           </a:xfrm>
           <a:prstGeom prst="rect">
             <a:avLst/>
@@ -2483,7 +2482,7 @@
               <a:buNone/>
             </a:pPr>
             <a:r>
-              <a:rPr lang="en-US" sz="1500" b="1" dirty="0">
+              <a:rPr lang="en-US" sz="1100" b="1" dirty="0">
                 <a:solidFill>
                   <a:srgbClr val="FFFFFF"/>
                 </a:solidFill>
@@ -2493,20 +2492,20 @@
               </a:rPr>
               <a:t>한만현</a:t>
             </a:r>
-            <a:endParaRPr lang="en-US" sz="1500" dirty="0"/>
-          </a:p>
-        </p:txBody>
-      </p:sp>
-      <p:sp>
-        <p:nvSpPr>
-          <p:cNvPr id="15" name="Text 13"/>
-          <p:cNvSpPr txBox="1"/>
-          <p:nvPr/>
-        </p:nvSpPr>
-        <p:spPr>
-          <a:xfrm>
-            <a:off x="3291840" y="2670048"/>
-            <a:ext cx="1280160" cy="228600"/>
+            <a:endParaRPr lang="en-US" sz="1100" dirty="0"/>
+          </a:p>
+        </p:txBody>
+      </p:sp>
+      <p:sp>
+        <p:nvSpPr>
+          <p:cNvPr id="37" name="Role 2"/>
+          <p:cNvSpPr txBox="1"/>
+          <p:nvPr/>
+        </p:nvSpPr>
+        <p:spPr>
+          <a:xfrm>
+            <a:off x="2546604" y="3520169"/>
+            <a:ext cx="916686" cy="201168"/>
           </a:xfrm>
           <a:prstGeom prst="rect">
             <a:avLst/>
@@ -2522,7 +2521,7 @@
               <a:buNone/>
             </a:pPr>
             <a:r>
-              <a:rPr lang="en-US" sz="950" dirty="0">
+              <a:rPr lang="en-US" sz="800" dirty="0">
                 <a:solidFill>
                   <a:srgbClr val="B8C0CE"/>
                 </a:solidFill>
@@ -2532,20 +2531,45 @@
               </a:rPr>
               <a:t>공인회계사</a:t>
             </a:r>
-            <a:endParaRPr lang="en-US" sz="950" dirty="0"/>
-          </a:p>
-        </p:txBody>
-      </p:sp>
-      <p:sp>
-        <p:nvSpPr>
-          <p:cNvPr id="16" name="Shape 14"/>
+            <a:endParaRPr lang="en-US" sz="800" dirty="0"/>
+          </a:p>
+        </p:txBody>
+      </p:sp>
+      <p:pic>
+        <p:nvPicPr>
+          <p:cNvPr id="38" name="Photo 이지훈"/>
+          <p:cNvPicPr>
+            <a:picLocks noChangeAspect="1"/>
+          </p:cNvPicPr>
+          <p:nvPr/>
+        </p:nvPicPr>
+        <p:blipFill>
+          <a:blip r:embed="rId7"/>
+          <a:srcRect/>
+          <a:stretch>
+            <a:fillRect/>
+          </a:stretch>
+        </p:blipFill>
+        <p:spPr>
+          <a:xfrm>
+            <a:off x="3591306" y="1965960"/>
+            <a:ext cx="916686" cy="1225025"/>
+          </a:xfrm>
+          <a:prstGeom prst="rect">
+            <a:avLst/>
+          </a:prstGeom>
+        </p:spPr>
+      </p:pic>
+      <p:sp>
+        <p:nvSpPr>
+          <p:cNvPr id="39" name="Card 3"/>
           <p:cNvSpPr/>
           <p:nvPr/>
         </p:nvSpPr>
         <p:spPr>
           <a:xfrm>
-            <a:off x="4709160" y="2103120"/>
-            <a:ext cx="1280160" cy="1005840"/>
+            <a:off x="3591306" y="3190985"/>
+            <a:ext cx="916686" cy="566928"/>
           </a:xfrm>
           <a:prstGeom prst="rect">
             <a:avLst/>
@@ -2563,14 +2587,14 @@
       </p:sp>
       <p:sp>
         <p:nvSpPr>
-          <p:cNvPr id="17" name="Text 15"/>
-          <p:cNvSpPr txBox="1"/>
-          <p:nvPr/>
-        </p:nvSpPr>
-        <p:spPr>
-          <a:xfrm>
-            <a:off x="4709160" y="2331720"/>
-            <a:ext cx="1280160" cy="320040"/>
+          <p:cNvPr id="40" name="Name 3"/>
+          <p:cNvSpPr txBox="1"/>
+          <p:nvPr/>
+        </p:nvSpPr>
+        <p:spPr>
+          <a:xfrm>
+            <a:off x="3591306" y="3245849"/>
+            <a:ext cx="916686" cy="274320"/>
           </a:xfrm>
           <a:prstGeom prst="rect">
             <a:avLst/>
@@ -2586,7 +2610,7 @@
               <a:buNone/>
             </a:pPr>
             <a:r>
-              <a:rPr lang="en-US" sz="1500" b="1" dirty="0">
+              <a:rPr lang="en-US" sz="1100" b="1" dirty="0">
                 <a:solidFill>
                   <a:srgbClr val="FFFFFF"/>
                 </a:solidFill>
@@ -2596,20 +2620,20 @@
               </a:rPr>
               <a:t>이지훈</a:t>
             </a:r>
-            <a:endParaRPr lang="en-US" sz="1500" dirty="0"/>
-          </a:p>
-        </p:txBody>
-      </p:sp>
-      <p:sp>
-        <p:nvSpPr>
-          <p:cNvPr id="18" name="Text 16"/>
-          <p:cNvSpPr txBox="1"/>
-          <p:nvPr/>
-        </p:nvSpPr>
-        <p:spPr>
-          <a:xfrm>
-            <a:off x="4709160" y="2670048"/>
-            <a:ext cx="1280160" cy="228600"/>
+            <a:endParaRPr lang="en-US" sz="1100" dirty="0"/>
+          </a:p>
+        </p:txBody>
+      </p:sp>
+      <p:sp>
+        <p:nvSpPr>
+          <p:cNvPr id="41" name="Role 3"/>
+          <p:cNvSpPr txBox="1"/>
+          <p:nvPr/>
+        </p:nvSpPr>
+        <p:spPr>
+          <a:xfrm>
+            <a:off x="3591306" y="3520169"/>
+            <a:ext cx="916686" cy="201168"/>
           </a:xfrm>
           <a:prstGeom prst="rect">
             <a:avLst/>
@@ -2625,7 +2649,7 @@
               <a:buNone/>
             </a:pPr>
             <a:r>
-              <a:rPr lang="en-US" sz="950" dirty="0">
+              <a:rPr lang="en-US" sz="800" dirty="0">
                 <a:solidFill>
                   <a:srgbClr val="B8C0CE"/>
                 </a:solidFill>
@@ -2635,20 +2659,45 @@
               </a:rPr>
               <a:t>공인회계사</a:t>
             </a:r>
-            <a:endParaRPr lang="en-US" sz="950" dirty="0"/>
-          </a:p>
-        </p:txBody>
-      </p:sp>
-      <p:sp>
-        <p:nvSpPr>
-          <p:cNvPr id="19" name="Shape 17"/>
+            <a:endParaRPr lang="en-US" sz="800" dirty="0"/>
+          </a:p>
+        </p:txBody>
+      </p:sp>
+      <p:pic>
+        <p:nvPicPr>
+          <p:cNvPr id="42" name="Photo 이준호"/>
+          <p:cNvPicPr>
+            <a:picLocks noChangeAspect="1"/>
+          </p:cNvPicPr>
+          <p:nvPr/>
+        </p:nvPicPr>
+        <p:blipFill>
+          <a:blip r:embed="rId8"/>
+          <a:srcRect/>
+          <a:stretch>
+            <a:fillRect/>
+          </a:stretch>
+        </p:blipFill>
+        <p:spPr>
+          <a:xfrm>
+            <a:off x="4636008" y="1965960"/>
+            <a:ext cx="916686" cy="1225025"/>
+          </a:xfrm>
+          <a:prstGeom prst="rect">
+            <a:avLst/>
+          </a:prstGeom>
+        </p:spPr>
+      </p:pic>
+      <p:sp>
+        <p:nvSpPr>
+          <p:cNvPr id="43" name="Card 4"/>
           <p:cNvSpPr/>
           <p:nvPr/>
         </p:nvSpPr>
         <p:spPr>
           <a:xfrm>
-            <a:off x="6126480" y="2103120"/>
-            <a:ext cx="1280160" cy="1005840"/>
+            <a:off x="4636008" y="3190985"/>
+            <a:ext cx="916686" cy="566928"/>
           </a:xfrm>
           <a:prstGeom prst="rect">
             <a:avLst/>
@@ -2666,14 +2715,14 @@
       </p:sp>
       <p:sp>
         <p:nvSpPr>
-          <p:cNvPr id="20" name="Text 18"/>
-          <p:cNvSpPr txBox="1"/>
-          <p:nvPr/>
-        </p:nvSpPr>
-        <p:spPr>
-          <a:xfrm>
-            <a:off x="6126480" y="2331720"/>
-            <a:ext cx="1280160" cy="320040"/>
+          <p:cNvPr id="44" name="Name 4"/>
+          <p:cNvSpPr txBox="1"/>
+          <p:nvPr/>
+        </p:nvSpPr>
+        <p:spPr>
+          <a:xfrm>
+            <a:off x="4636008" y="3245849"/>
+            <a:ext cx="916686" cy="274320"/>
           </a:xfrm>
           <a:prstGeom prst="rect">
             <a:avLst/>
@@ -2689,7 +2738,7 @@
               <a:buNone/>
             </a:pPr>
             <a:r>
-              <a:rPr lang="en-US" sz="1500" b="1" dirty="0">
+              <a:rPr lang="en-US" sz="1100" b="1" dirty="0">
                 <a:solidFill>
                   <a:srgbClr val="FFFFFF"/>
                 </a:solidFill>
@@ -2699,20 +2748,20 @@
               </a:rPr>
               <a:t>이준호</a:t>
             </a:r>
-            <a:endParaRPr lang="en-US" sz="1500" dirty="0"/>
-          </a:p>
-        </p:txBody>
-      </p:sp>
-      <p:sp>
-        <p:nvSpPr>
-          <p:cNvPr id="21" name="Text 19"/>
-          <p:cNvSpPr txBox="1"/>
-          <p:nvPr/>
-        </p:nvSpPr>
-        <p:spPr>
-          <a:xfrm>
-            <a:off x="6126480" y="2670048"/>
-            <a:ext cx="1280160" cy="228600"/>
+            <a:endParaRPr lang="en-US" sz="1100" dirty="0"/>
+          </a:p>
+        </p:txBody>
+      </p:sp>
+      <p:sp>
+        <p:nvSpPr>
+          <p:cNvPr id="45" name="Role 4"/>
+          <p:cNvSpPr txBox="1"/>
+          <p:nvPr/>
+        </p:nvSpPr>
+        <p:spPr>
+          <a:xfrm>
+            <a:off x="4636008" y="3520169"/>
+            <a:ext cx="916686" cy="201168"/>
           </a:xfrm>
           <a:prstGeom prst="rect">
             <a:avLst/>
@@ -2728,7 +2777,7 @@
               <a:buNone/>
             </a:pPr>
             <a:r>
-              <a:rPr lang="en-US" sz="950" dirty="0">
+              <a:rPr lang="en-US" sz="800" dirty="0">
                 <a:solidFill>
                   <a:srgbClr val="B8C0CE"/>
                 </a:solidFill>
@@ -2738,20 +2787,45 @@
               </a:rPr>
               <a:t>공인회계사</a:t>
             </a:r>
-            <a:endParaRPr lang="en-US" sz="950" dirty="0"/>
-          </a:p>
-        </p:txBody>
-      </p:sp>
-      <p:sp>
-        <p:nvSpPr>
-          <p:cNvPr id="22" name="Shape 20"/>
+            <a:endParaRPr lang="en-US" sz="800" dirty="0"/>
+          </a:p>
+        </p:txBody>
+      </p:sp>
+      <p:pic>
+        <p:nvPicPr>
+          <p:cNvPr id="46" name="Photo 이범기"/>
+          <p:cNvPicPr>
+            <a:picLocks noChangeAspect="1"/>
+          </p:cNvPicPr>
+          <p:nvPr/>
+        </p:nvPicPr>
+        <p:blipFill>
+          <a:blip r:embed="rId9"/>
+          <a:srcRect/>
+          <a:stretch>
+            <a:fillRect/>
+          </a:stretch>
+        </p:blipFill>
+        <p:spPr>
+          <a:xfrm>
+            <a:off x="5680710" y="1965960"/>
+            <a:ext cx="916686" cy="1225025"/>
+          </a:xfrm>
+          <a:prstGeom prst="rect">
+            <a:avLst/>
+          </a:prstGeom>
+        </p:spPr>
+      </p:pic>
+      <p:sp>
+        <p:nvSpPr>
+          <p:cNvPr id="47" name="Card 5"/>
           <p:cNvSpPr/>
           <p:nvPr/>
         </p:nvSpPr>
         <p:spPr>
           <a:xfrm>
-            <a:off x="7543800" y="2103120"/>
-            <a:ext cx="1280160" cy="1005840"/>
+            <a:off x="5680710" y="3190985"/>
+            <a:ext cx="916686" cy="566928"/>
           </a:xfrm>
           <a:prstGeom prst="rect">
             <a:avLst/>
@@ -2769,14 +2843,14 @@
       </p:sp>
       <p:sp>
         <p:nvSpPr>
-          <p:cNvPr id="23" name="Text 21"/>
-          <p:cNvSpPr txBox="1"/>
-          <p:nvPr/>
-        </p:nvSpPr>
-        <p:spPr>
-          <a:xfrm>
-            <a:off x="7543800" y="2331720"/>
-            <a:ext cx="1280160" cy="320040"/>
+          <p:cNvPr id="48" name="Name 5"/>
+          <p:cNvSpPr txBox="1"/>
+          <p:nvPr/>
+        </p:nvSpPr>
+        <p:spPr>
+          <a:xfrm>
+            <a:off x="5680710" y="3245849"/>
+            <a:ext cx="916686" cy="274320"/>
           </a:xfrm>
           <a:prstGeom prst="rect">
             <a:avLst/>
@@ -2792,7 +2866,7 @@
               <a:buNone/>
             </a:pPr>
             <a:r>
-              <a:rPr lang="en-US" sz="1500" b="1" dirty="0">
+              <a:rPr lang="en-US" sz="1100" b="1" dirty="0">
                 <a:solidFill>
                   <a:srgbClr val="FFFFFF"/>
                 </a:solidFill>
@@ -2802,20 +2876,20 @@
               </a:rPr>
               <a:t>이범기</a:t>
             </a:r>
-            <a:endParaRPr lang="en-US" sz="1500" dirty="0"/>
-          </a:p>
-        </p:txBody>
-      </p:sp>
-      <p:sp>
-        <p:nvSpPr>
-          <p:cNvPr id="24" name="Text 22"/>
-          <p:cNvSpPr txBox="1"/>
-          <p:nvPr/>
-        </p:nvSpPr>
-        <p:spPr>
-          <a:xfrm>
-            <a:off x="7543800" y="2670048"/>
-            <a:ext cx="1280160" cy="228600"/>
+            <a:endParaRPr lang="en-US" sz="1100" dirty="0"/>
+          </a:p>
+        </p:txBody>
+      </p:sp>
+      <p:sp>
+        <p:nvSpPr>
+          <p:cNvPr id="49" name="Role 5"/>
+          <p:cNvSpPr txBox="1"/>
+          <p:nvPr/>
+        </p:nvSpPr>
+        <p:spPr>
+          <a:xfrm>
+            <a:off x="5680710" y="3520169"/>
+            <a:ext cx="916686" cy="201168"/>
           </a:xfrm>
           <a:prstGeom prst="rect">
             <a:avLst/>
@@ -2831,7 +2905,7 @@
               <a:buNone/>
             </a:pPr>
             <a:r>
-              <a:rPr lang="en-US" sz="950" dirty="0">
+              <a:rPr lang="en-US" sz="800" dirty="0">
                 <a:solidFill>
                   <a:srgbClr val="B8C0CE"/>
                 </a:solidFill>
@@ -2841,20 +2915,70 @@
               </a:rPr>
               <a:t>공인회계사</a:t>
             </a:r>
-            <a:endParaRPr lang="en-US" sz="950" dirty="0"/>
-          </a:p>
-        </p:txBody>
-      </p:sp>
-      <p:sp>
-        <p:nvSpPr>
-          <p:cNvPr id="25" name="Text 23"/>
-          <p:cNvSpPr txBox="1"/>
-          <p:nvPr/>
-        </p:nvSpPr>
-        <p:spPr>
-          <a:xfrm>
-            <a:off x="457200" y="3566160"/>
-            <a:ext cx="8229600" cy="274320"/>
+            <a:endParaRPr lang="en-US" sz="800" dirty="0"/>
+          </a:p>
+        </p:txBody>
+      </p:sp>
+      <p:pic>
+        <p:nvPicPr>
+          <p:cNvPr id="50" name="Photo 윤준영"/>
+          <p:cNvPicPr>
+            <a:picLocks noChangeAspect="1"/>
+          </p:cNvPicPr>
+          <p:nvPr/>
+        </p:nvPicPr>
+        <p:blipFill>
+          <a:blip r:embed="rId10"/>
+          <a:srcRect/>
+          <a:stretch>
+            <a:fillRect/>
+          </a:stretch>
+        </p:blipFill>
+        <p:spPr>
+          <a:xfrm>
+            <a:off x="6725412" y="1965960"/>
+            <a:ext cx="916686" cy="1225025"/>
+          </a:xfrm>
+          <a:prstGeom prst="rect">
+            <a:avLst/>
+          </a:prstGeom>
+        </p:spPr>
+      </p:pic>
+      <p:sp>
+        <p:nvSpPr>
+          <p:cNvPr id="51" name="Card 6"/>
+          <p:cNvSpPr/>
+          <p:nvPr/>
+        </p:nvSpPr>
+        <p:spPr>
+          <a:xfrm>
+            <a:off x="6725412" y="3190985"/>
+            <a:ext cx="916686" cy="566928"/>
+          </a:xfrm>
+          <a:prstGeom prst="rect">
+            <a:avLst/>
+          </a:prstGeom>
+          <a:solidFill>
+            <a:srgbClr val="0C111C"/>
+          </a:solidFill>
+          <a:ln w="9525">
+            <a:solidFill>
+              <a:srgbClr val="1E2633"/>
+            </a:solidFill>
+            <a:prstDash val="solid"/>
+          </a:ln>
+        </p:spPr>
+      </p:sp>
+      <p:sp>
+        <p:nvSpPr>
+          <p:cNvPr id="52" name="Name 6"/>
+          <p:cNvSpPr txBox="1"/>
+          <p:nvPr/>
+        </p:nvSpPr>
+        <p:spPr>
+          <a:xfrm>
+            <a:off x="6725412" y="3245849"/>
+            <a:ext cx="916686" cy="274320"/>
           </a:xfrm>
           <a:prstGeom prst="rect">
             <a:avLst/>
@@ -2870,17 +2994,184 @@
               <a:buNone/>
             </a:pPr>
             <a:r>
-              <a:rPr lang="en-US" sz="950" i="1" dirty="0">
-                <a:solidFill>
-                  <a:srgbClr val="6F7A8C"/>
-                </a:solidFill>
-                <a:latin typeface="Arial" pitchFamily="34" charset="0"/>
-                <a:ea typeface="Arial" pitchFamily="34" charset="-122"/>
-                <a:cs typeface="Arial" pitchFamily="34" charset="-120"/>
-              </a:rPr>
-              <a:t>Our Principles  ·  Act with Ownership  |  Leverage Technology for Excellence  |  Uphold Integrity</a:t>
-            </a:r>
-            <a:endParaRPr lang="en-US" sz="950" dirty="0"/>
+              <a:rPr lang="en-US" sz="1100" b="1" dirty="0">
+                <a:solidFill>
+                  <a:srgbClr val="FFFFFF"/>
+                </a:solidFill>
+                <a:latin typeface="Malgun Gothic" pitchFamily="34" charset="0"/>
+                <a:ea typeface="Malgun Gothic" pitchFamily="34" charset="-122"/>
+                <a:cs typeface="Malgun Gothic" pitchFamily="34" charset="-120"/>
+              </a:rPr>
+              <a:t>윤준영</a:t>
+            </a:r>
+            <a:endParaRPr lang="en-US" sz="1100" dirty="0"/>
+          </a:p>
+        </p:txBody>
+      </p:sp>
+      <p:sp>
+        <p:nvSpPr>
+          <p:cNvPr id="53" name="Role 6"/>
+          <p:cNvSpPr txBox="1"/>
+          <p:nvPr/>
+        </p:nvSpPr>
+        <p:spPr>
+          <a:xfrm>
+            <a:off x="6725412" y="3520169"/>
+            <a:ext cx="916686" cy="201168"/>
+          </a:xfrm>
+          <a:prstGeom prst="rect">
+            <a:avLst/>
+          </a:prstGeom>
+          <a:noFill/>
+          <a:ln/>
+        </p:spPr>
+        <p:txBody>
+          <a:bodyPr wrap="square" lIns="0" tIns="0" rIns="0" bIns="0" rtlCol="0" anchor="ctr"/>
+          <a:lstStyle/>
+          <a:p>
+            <a:pPr algn="ctr" indent="0" marL="0">
+              <a:buNone/>
+            </a:pPr>
+            <a:r>
+              <a:rPr lang="en-US" sz="800" dirty="0">
+                <a:solidFill>
+                  <a:srgbClr val="B8C0CE"/>
+                </a:solidFill>
+                <a:latin typeface="Malgun Gothic" pitchFamily="34" charset="0"/>
+                <a:ea typeface="Malgun Gothic" pitchFamily="34" charset="-122"/>
+                <a:cs typeface="Malgun Gothic" pitchFamily="34" charset="-120"/>
+              </a:rPr>
+              <a:t>공인회계사</a:t>
+            </a:r>
+            <a:endParaRPr lang="en-US" sz="800" dirty="0"/>
+          </a:p>
+        </p:txBody>
+      </p:sp>
+      <p:pic>
+        <p:nvPicPr>
+          <p:cNvPr id="54" name="Photo 김은영"/>
+          <p:cNvPicPr>
+            <a:picLocks noChangeAspect="1"/>
+          </p:cNvPicPr>
+          <p:nvPr/>
+        </p:nvPicPr>
+        <p:blipFill>
+          <a:blip r:embed="rId11"/>
+          <a:srcRect/>
+          <a:stretch>
+            <a:fillRect/>
+          </a:stretch>
+        </p:blipFill>
+        <p:spPr>
+          <a:xfrm>
+            <a:off x="7770114" y="1965960"/>
+            <a:ext cx="916686" cy="1225025"/>
+          </a:xfrm>
+          <a:prstGeom prst="rect">
+            <a:avLst/>
+          </a:prstGeom>
+        </p:spPr>
+      </p:pic>
+      <p:sp>
+        <p:nvSpPr>
+          <p:cNvPr id="55" name="Card 7"/>
+          <p:cNvSpPr/>
+          <p:nvPr/>
+        </p:nvSpPr>
+        <p:spPr>
+          <a:xfrm>
+            <a:off x="7770114" y="3190985"/>
+            <a:ext cx="916686" cy="566928"/>
+          </a:xfrm>
+          <a:prstGeom prst="rect">
+            <a:avLst/>
+          </a:prstGeom>
+          <a:solidFill>
+            <a:srgbClr val="0C111C"/>
+          </a:solidFill>
+          <a:ln w="9525">
+            <a:solidFill>
+              <a:srgbClr val="1E2633"/>
+            </a:solidFill>
+            <a:prstDash val="solid"/>
+          </a:ln>
+        </p:spPr>
+      </p:sp>
+      <p:sp>
+        <p:nvSpPr>
+          <p:cNvPr id="56" name="Name 7"/>
+          <p:cNvSpPr txBox="1"/>
+          <p:nvPr/>
+        </p:nvSpPr>
+        <p:spPr>
+          <a:xfrm>
+            <a:off x="7770114" y="3245849"/>
+            <a:ext cx="916686" cy="274320"/>
+          </a:xfrm>
+          <a:prstGeom prst="rect">
+            <a:avLst/>
+          </a:prstGeom>
+          <a:noFill/>
+          <a:ln/>
+        </p:spPr>
+        <p:txBody>
+          <a:bodyPr wrap="square" lIns="0" tIns="0" rIns="0" bIns="0" rtlCol="0" anchor="ctr"/>
+          <a:lstStyle/>
+          <a:p>
+            <a:pPr algn="ctr" indent="0" marL="0">
+              <a:buNone/>
+            </a:pPr>
+            <a:r>
+              <a:rPr lang="en-US" sz="1100" b="1" dirty="0">
+                <a:solidFill>
+                  <a:srgbClr val="FFFFFF"/>
+                </a:solidFill>
+                <a:latin typeface="Malgun Gothic" pitchFamily="34" charset="0"/>
+                <a:ea typeface="Malgun Gothic" pitchFamily="34" charset="-122"/>
+                <a:cs typeface="Malgun Gothic" pitchFamily="34" charset="-120"/>
+              </a:rPr>
+              <a:t>김은영</a:t>
+            </a:r>
+            <a:endParaRPr lang="en-US" sz="1100" dirty="0"/>
+          </a:p>
+        </p:txBody>
+      </p:sp>
+      <p:sp>
+        <p:nvSpPr>
+          <p:cNvPr id="57" name="Role 7"/>
+          <p:cNvSpPr txBox="1"/>
+          <p:nvPr/>
+        </p:nvSpPr>
+        <p:spPr>
+          <a:xfrm>
+            <a:off x="7770114" y="3520169"/>
+            <a:ext cx="916686" cy="201168"/>
+          </a:xfrm>
+          <a:prstGeom prst="rect">
+            <a:avLst/>
+          </a:prstGeom>
+          <a:noFill/>
+          <a:ln/>
+        </p:spPr>
+        <p:txBody>
+          <a:bodyPr wrap="square" lIns="0" tIns="0" rIns="0" bIns="0" rtlCol="0" anchor="ctr"/>
+          <a:lstStyle/>
+          <a:p>
+            <a:pPr algn="ctr" indent="0" marL="0">
+              <a:buNone/>
+            </a:pPr>
+            <a:r>
+              <a:rPr lang="en-US" sz="800" dirty="0">
+                <a:solidFill>
+                  <a:srgbClr val="B8C0CE"/>
+                </a:solidFill>
+                <a:latin typeface="Malgun Gothic" pitchFamily="34" charset="0"/>
+                <a:ea typeface="Malgun Gothic" pitchFamily="34" charset="-122"/>
+                <a:cs typeface="Malgun Gothic" pitchFamily="34" charset="-120"/>
+              </a:rPr>
+              <a:t>세무사</a:t>
+            </a:r>
+            <a:endParaRPr lang="en-US" sz="800" dirty="0"/>
           </a:p>
         </p:txBody>
       </p:sp>
@@ -3804,6 +4095,31 @@
           </a:p>
         </p:txBody>
       </p:sp>
+      <p:pic>
+        <p:nvPicPr>
+          <p:cNvPr id="24" name="Photo office"/>
+          <p:cNvPicPr>
+            <a:picLocks noChangeAspect="1"/>
+          </p:cNvPicPr>
+          <p:nvPr/>
+        </p:nvPicPr>
+        <p:blipFill>
+          <a:blip r:embed="rId4"/>
+          <a:srcRect t="18316" b="18316"/>
+          <a:stretch>
+            <a:fillRect/>
+          </a:stretch>
+        </p:blipFill>
+        <p:spPr>
+          <a:xfrm>
+            <a:off x="6035040" y="685800"/>
+            <a:ext cx="2651760" cy="1371600"/>
+          </a:xfrm>
+          <a:prstGeom prst="rect">
+            <a:avLst/>
+          </a:prstGeom>
+        </p:spPr>
+      </p:pic>
     </p:spTree>
   </p:cSld>
   <p:clrMapOvr>
@@ -7471,6 +7787,31 @@
           </a:p>
         </p:txBody>
       </p:sp>
+      <p:pic>
+        <p:nvPicPr>
+          <p:cNvPr id="20" name="Photo audit"/>
+          <p:cNvPicPr>
+            <a:picLocks noChangeAspect="1"/>
+          </p:cNvPicPr>
+          <p:nvPr/>
+        </p:nvPicPr>
+        <p:blipFill>
+          <a:blip r:embed="rId4"/>
+          <a:srcRect t="24129" b="24129"/>
+          <a:stretch>
+            <a:fillRect/>
+          </a:stretch>
+        </p:blipFill>
+        <p:spPr>
+          <a:xfrm>
+            <a:off x="6172200" y="3657600"/>
+            <a:ext cx="2514600" cy="960120"/>
+          </a:xfrm>
+          <a:prstGeom prst="rect">
+            <a:avLst/>
+          </a:prstGeom>
+        </p:spPr>
+      </p:pic>
     </p:spTree>
   </p:cSld>
   <p:clrMapOvr>
@@ -9046,6 +9387,31 @@
           </a:p>
         </p:txBody>
       </p:sp>
+      <p:pic>
+        <p:nvPicPr>
+          <p:cNvPr id="18" name="Photo tax"/>
+          <p:cNvPicPr>
+            <a:picLocks noChangeAspect="1"/>
+          </p:cNvPicPr>
+          <p:nvPr/>
+        </p:nvPicPr>
+        <p:blipFill>
+          <a:blip r:embed="rId4"/>
+          <a:srcRect t="7678" b="7678"/>
+          <a:stretch>
+            <a:fillRect/>
+          </a:stretch>
+        </p:blipFill>
+        <p:spPr>
+          <a:xfrm>
+            <a:off x="6172200" y="2880360"/>
+            <a:ext cx="2514600" cy="1737360"/>
+          </a:xfrm>
+          <a:prstGeom prst="rect">
+            <a:avLst/>
+          </a:prstGeom>
+        </p:spPr>
+      </p:pic>
     </p:spTree>
   </p:cSld>
   <p:clrMapOvr>
